--- a/docs/lab_presentation_partB.pptx
+++ b/docs/lab_presentation_partB.pptx
@@ -624,7 +624,7 @@
           <a:p>
             <a:r>
               <a:rPr lang="en-US" dirty="0"/>
-              <a:t>This is the audience's favorite kind of experiment: one cheap manipulation, two clean opposite predictions.</a:t>
+              <a:t>Present honestly: the two outcomes are NOT mutually exclusive (a reference prompt can shift attention, priors, AND strategy at once). The control battery — paraphrases, length-matching, redirection, visual-representation-unchanged — turns it from a perturbation into a fork (plan annex A7).</a:t>
             </a:r>
             <a:endParaRPr lang="en-US" dirty="0"/>
           </a:p>
@@ -4401,7 +4401,7 @@
         <p:spPr>
           <a:xfrm>
             <a:off x="365760" y="1463040"/>
-            <a:ext cx="11430000" cy="3702277"/>
+            <a:ext cx="11430000" cy="2562235"/>
           </a:xfrm>
           <a:prstGeom prst="rect">
             <a:avLst/>
@@ -7431,7 +7431,7 @@
                 <a:ea typeface="Calibri" pitchFamily="34" charset="-122"/>
                 <a:cs typeface="Calibri" pitchFamily="34" charset="-120"/>
               </a:rPr>
-              <a:t>Why: the selection IS the answer</a:t>
+              <a:t>Why: selection + stimulus geometry already contain the answer</a:t>
             </a:r>
             <a:endParaRPr lang="en-US" sz="3000" dirty="0"/>
           </a:p>
@@ -16262,7 +16262,7 @@
                 <a:ea typeface="Calibri" pitchFamily="34" charset="-122"/>
                 <a:cs typeface="Calibri" pitchFamily="34" charset="-120"/>
               </a:rPr>
-              <a:t>3 — Oracle-text condition: feed ground-truth coordinates as TEXT. Correct answers show the LM can solve the downstream reasoning problem on explicit symbolic input — NARROWING the explanation toward visual extraction, reference resolution, cross-modal transfer, or accessibility, among other upstream differences (text input may also recruit a different strategy).</a:t>
+              <a:t>3 — Oracle-text condition: feed ground-truth coordinates as TEXT. Correct answers show the LM can solve the downstream reasoning problem on explicit symbolic input — a DOWNSTREAM COMPETENCE CONTROL: it rules out 'the LM cannot compute the relation' — nothing finer (text coordinates may recruit symbolic arithmetic with no multimodal binding at all).</a:t>
             </a:r>
             <a:endParaRPr lang="en-US" sz="1450" dirty="0"/>
           </a:p>
